--- a/decks/geog-tectonics/geog-tectonics_ch5_living-with-hazards.pptx
+++ b/decks/geog-tectonics/geog-tectonics_ch5_living-with-hazards.pptx
@@ -130,30 +130,30 @@
   <p:extLst>
     <p:ext uri="{521415D9-36F7-43E2-AB2F-B90AF26B5E84}">
       <p14:sectionLst xmlns:p14="http://schemas.microsoft.com/office/powerpoint/2010/main">
-        <p14:section name="Opening" id="{253fd571-5f24-a738-e1f9-bf525173d82e}">
+        <p14:section name="Opening" id="{36864c44-eb8c-9775-460c-b884eba15b84}">
           <p14:sldIdLst>
             <p14:sldId id="256"/>
           </p14:sldIdLst>
         </p14:section>
-        <p14:section name="Gate" id="{4ccaefec-300b-d5a8-c873-3effc7095e7a}">
+        <p14:section name="Gate" id="{e68eef0b-4f28-3a1c-8c51-7f74b20f296e}">
           <p14:sldIdLst>
             <p14:sldId id="257"/>
             <p14:sldId id="258"/>
           </p14:sldIdLst>
         </p14:section>
-        <p14:section name="Pre-teach" id="{ae3968f7-9781-3f31-dbcd-56590f38f5a8}">
+        <p14:section name="Pre-teach" id="{77dad687-acc9-aaba-23e3-a357a7a758ea}">
           <p14:sldIdLst>
             <p14:sldId id="259"/>
             <p14:sldId id="260"/>
           </p14:sldIdLst>
         </p14:section>
-        <p14:section name="Read-along" id="{b2c4693f-d0ad-1512-7bfe-374db337a344}">
+        <p14:section name="Read-along" id="{cc0b68d5-6a66-76f8-4c59-3645b28d6b39}">
           <p14:sldIdLst>
             <p14:sldId id="261"/>
             <p14:sldId id="262"/>
           </p14:sldIdLst>
         </p14:section>
-        <p14:section name="Teach" id="{b48ca640-cd0b-9154-1b0c-3b2800a2eb7f}">
+        <p14:section name="Teach" id="{721f1866-3c17-5f9d-7d04-bcb0799eb2f9}">
           <p14:sldIdLst>
             <p14:sldId id="263"/>
             <p14:sldId id="264"/>
@@ -165,7 +165,7 @@
             <p14:sldId id="270"/>
           </p14:sldIdLst>
         </p14:section>
-        <p14:section name="Routes" id="{a0f553bb-4d15-8d16-f1ea-f9a9ef94f847}">
+        <p14:section name="Routes" id="{5a914ad6-4888-fd0e-317b-803e6cee8858}">
           <p14:sldIdLst>
             <p14:sldId id="271"/>
             <p14:sldId id="272"/>
@@ -173,12 +173,12 @@
             <p14:sldId id="274"/>
           </p14:sldIdLst>
         </p14:section>
-        <p14:section name="Close" id="{56c937ca-2d0c-4b12-4a1d-e4606e0b54d9}">
+        <p14:section name="Close" id="{58cc8f9b-b4a5-e3cb-4ffb-3f4e7ecb5b3a}">
           <p14:sldIdLst>
             <p14:sldId id="275"/>
           </p14:sldIdLst>
         </p14:section>
-        <p14:section name="Answers" id="{e5f9040b-42d4-39a2-4bf2-4b65e60f9522}">
+        <p14:section name="Answers" id="{9b058e4f-3ee2-ba14-8fa8-4365a07fdb4b}">
           <p14:sldIdLst>
             <p14:sldId id="276"/>
             <p14:sldId id="277"/>
@@ -1610,7 +1610,7 @@
             <a:r>
               <a:rPr lang="en-US" dirty="0"/>
               <a:t>Do now — retrieval. Silent, no notes, no help: recall comes before any support. Give about four minutes.
-1. Which of these is a benefit of living near a volcano?  →  A   Fertile soil for growing crops
+1. Which of these is a benefit of living near a volcano?  →  C   Fertile soil for growing crops
 2. The Indian Ocean tsunami happened in 2004 and the Sichuan earthquake in 2008. How many years apart were the two events?  →  4 years
 3. A place where very hot rock rises from deep in the mantle and makes volcanoes away from a plate boundary is called a ___.  →  hot spot
 Circulate: who gets 3/3 (Stretch route), 2/3 (Core), 0–1 (Support)? Use this to route pupils later in the lesson.</a:t>
@@ -1703,7 +1703,7 @@
               <a:rPr lang="en-US" dirty="0"/>
               <a:t>Exit ticket — individual, silent, on a slip or mini-whiteboard. Recall before help: no notes, no lanes, no hints. Collect before pupils leave.
 Question: Farmers grow tomatoes on the slopes of Mount Vesuvius in Italy, even though it is an active volcano. Why?
-Answer: A   Volcanic ash has made the soil very fertile, so crops grow well. Volcanic ash breaks down into mineral-rich, fertile soil, so the slopes of Vesuvius are excellent farmland despite the risk.
+Answer: C   Volcanic ash has made the soil very fertile, so crops grow well. Volcanic ash breaks down into mineral-rich, fertile soil, so the slopes of Vesuvius are excellent farmland despite the risk.
 Source of this question: module 3 task ("Why farm on a volcano?") from the manifest.
 Sort the slips: correct → ready to move on; incorrect → start next lesson in the pre-teach group, with the read-along and the Support lane. Same destination next time.</a:t>
             </a:r>
@@ -2071,7 +2071,7 @@
             <a:r>
               <a:rPr lang="en-US" dirty="0"/>
               <a:t>Answers — exit ticket: Exit ticket. Reveal the answer; pupils mark their own work in a different colour, then read the "why" together. Same destination for every lane, so one answer serves the whole class.
-Answer: A   Volcanic ash has made the soil very fertile, so crops grow well
+Answer: C   Volcanic ash has made the soil very fertile, so crops grow well
 Why: Volcanic ash breaks down into mineral-rich, fertile soil, so the slopes of Vesuvius are excellent farmland despite the risk.
 Ask a Support pupil to explain one step, and a Stretch pupil to share their extension.</a:t>
             </a:r>
@@ -2162,7 +2162,7 @@
             <a:r>
               <a:rPr lang="en-US" dirty="0"/>
               <a:t>Answers — pupils mark their own in a different colour, then hands up for 3/3, 2/3, 1/3.
-1. A   Fertile soil for growing crops. Volcanic ash is rich in minerals, so the soil around a volcano is fertile and good for farming.
+1. C   Fertile soil for growing crops. Volcanic ash is rich in minerals, so the soil around a volcano is fertile and good for farming.
 2. 4 years. 2008 − 2004 = 4 years.
 3. hot spot. Hawaii sits on a hot spot in the middle of the Pacific Plate, far from any boundary.
 Say the route each score points to: 3/3 Stretch, 2/3 Core, 0–1 Support. Pupils may choose to move up.</a:t>
@@ -11626,7 +11626,7 @@
                 <a:ea typeface="Calibri" pitchFamily="34" charset="-122"/>
                 <a:cs typeface="Calibri" pitchFamily="34" charset="-120"/>
               </a:rPr>
-              <a:t>Fertile soil for growing crops</a:t>
+              <a:t>Lava that destroys homes</a:t>
             </a:r>
             <a:endParaRPr lang="en-US" sz="2200" dirty="0"/>
           </a:p>
@@ -11700,7 +11700,7 @@
                 <a:ea typeface="Calibri" pitchFamily="34" charset="-122"/>
                 <a:cs typeface="Calibri" pitchFamily="34" charset="-120"/>
               </a:rPr>
-              <a:t>Ash that blocks roads</a:t>
+              <a:t>Fertile soil for growing crops</a:t>
             </a:r>
             <a:endParaRPr lang="en-US" sz="2200" dirty="0"/>
           </a:p>
@@ -11737,7 +11737,7 @@
                 <a:ea typeface="Calibri" pitchFamily="34" charset="-122"/>
                 <a:cs typeface="Calibri" pitchFamily="34" charset="-120"/>
               </a:rPr>
-              <a:t>Lava that destroys homes</a:t>
+              <a:t>Ash that blocks roads</a:t>
             </a:r>
             <a:endParaRPr lang="en-US" sz="2200" dirty="0"/>
           </a:p>
@@ -12509,7 +12509,7 @@
                 <a:ea typeface="Calibri" pitchFamily="34" charset="-122"/>
                 <a:cs typeface="Calibri" pitchFamily="34" charset="-120"/>
               </a:rPr>
-              <a:t>Volcanic ash has made the soil very fertile, so crops grow well</a:t>
+              <a:t>The land there is free because nobody else wants it</a:t>
             </a:r>
             <a:endParaRPr lang="en-US" sz="2400" dirty="0"/>
           </a:p>
@@ -12546,7 +12546,7 @@
                 <a:ea typeface="Calibri" pitchFamily="34" charset="-122"/>
                 <a:cs typeface="Calibri" pitchFamily="34" charset="-120"/>
               </a:rPr>
-              <a:t>The heat from the lava keeps the plants warm all year</a:t>
+              <a:t>There are never any earthquakes near a volcano</a:t>
             </a:r>
             <a:endParaRPr lang="en-US" sz="2400" dirty="0"/>
           </a:p>
@@ -12583,7 +12583,7 @@
                 <a:ea typeface="Calibri" pitchFamily="34" charset="-122"/>
                 <a:cs typeface="Calibri" pitchFamily="34" charset="-120"/>
               </a:rPr>
-              <a:t>There are never any earthquakes near a volcano</a:t>
+              <a:t>Volcanic ash has made the soil very fertile, so crops grow well</a:t>
             </a:r>
             <a:endParaRPr lang="en-US" sz="2400" dirty="0"/>
           </a:p>
@@ -12620,7 +12620,7 @@
                 <a:ea typeface="Calibri" pitchFamily="34" charset="-122"/>
                 <a:cs typeface="Calibri" pitchFamily="34" charset="-120"/>
               </a:rPr>
-              <a:t>The land there is free because nobody else wants it</a:t>
+              <a:t>The heat from the lava keeps the plants warm all year</a:t>
             </a:r>
             <a:endParaRPr lang="en-US" sz="2400" dirty="0"/>
           </a:p>
@@ -14544,7 +14544,7 @@
                 <a:ea typeface="Cambria" pitchFamily="34" charset="-122"/>
                 <a:cs typeface="Cambria" pitchFamily="34" charset="-120"/>
               </a:rPr>
-              <a:t>A   Volcanic ash has made the soil very fertile, so crops grow well</a:t>
+              <a:t>C   Volcanic ash has made the soil very fertile, so crops grow well</a:t>
             </a:r>
             <a:endParaRPr lang="en-US" sz="1800" dirty="0"/>
           </a:p>
@@ -15065,7 +15065,7 @@
                 <a:ea typeface="Calibri" pitchFamily="34" charset="-122"/>
                 <a:cs typeface="Calibri" pitchFamily="34" charset="-120"/>
               </a:rPr>
-              <a:t>A   Fertile soil for growing crops</a:t>
+              <a:t>C   Fertile soil for growing crops</a:t>
             </a:r>
             <a:endParaRPr lang="en-US" sz="2200" dirty="0"/>
           </a:p>

--- a/decks/geog-tectonics/geog-tectonics_ch5_living-with-hazards.pptx
+++ b/decks/geog-tectonics/geog-tectonics_ch5_living-with-hazards.pptx
@@ -130,30 +130,30 @@
   <p:extLst>
     <p:ext uri="{521415D9-36F7-43E2-AB2F-B90AF26B5E84}">
       <p14:sectionLst xmlns:p14="http://schemas.microsoft.com/office/powerpoint/2010/main">
-        <p14:section name="Opening" id="{36864c44-eb8c-9775-460c-b884eba15b84}">
+        <p14:section name="Opening" id="{6f2cad1f-a2e6-56d7-d2fa-542d38ac9aef}">
           <p14:sldIdLst>
             <p14:sldId id="256"/>
           </p14:sldIdLst>
         </p14:section>
-        <p14:section name="Gate" id="{e68eef0b-4f28-3a1c-8c51-7f74b20f296e}">
+        <p14:section name="Gate" id="{1949e095-a479-3938-cf14-86cb0db8b86e}">
           <p14:sldIdLst>
             <p14:sldId id="257"/>
             <p14:sldId id="258"/>
           </p14:sldIdLst>
         </p14:section>
-        <p14:section name="Pre-teach" id="{77dad687-acc9-aaba-23e3-a357a7a758ea}">
+        <p14:section name="Pre-teach" id="{d4eabfae-2dd4-0672-d9a6-31d8fac1dcaa}">
           <p14:sldIdLst>
             <p14:sldId id="259"/>
             <p14:sldId id="260"/>
           </p14:sldIdLst>
         </p14:section>
-        <p14:section name="Read-along" id="{cc0b68d5-6a66-76f8-4c59-3645b28d6b39}">
+        <p14:section name="Read-along" id="{67b87abf-f949-185e-1976-ddb7d060c8a8}">
           <p14:sldIdLst>
             <p14:sldId id="261"/>
             <p14:sldId id="262"/>
           </p14:sldIdLst>
         </p14:section>
-        <p14:section name="Teach" id="{721f1866-3c17-5f9d-7d04-bcb0799eb2f9}">
+        <p14:section name="Teach" id="{da54ceae-c1de-309e-7ddd-881aae0ce6d6}">
           <p14:sldIdLst>
             <p14:sldId id="263"/>
             <p14:sldId id="264"/>
@@ -165,7 +165,7 @@
             <p14:sldId id="270"/>
           </p14:sldIdLst>
         </p14:section>
-        <p14:section name="Routes" id="{5a914ad6-4888-fd0e-317b-803e6cee8858}">
+        <p14:section name="Routes" id="{aefc38f8-ebd6-67a9-c883-02fee920fcf5}">
           <p14:sldIdLst>
             <p14:sldId id="271"/>
             <p14:sldId id="272"/>
@@ -173,12 +173,12 @@
             <p14:sldId id="274"/>
           </p14:sldIdLst>
         </p14:section>
-        <p14:section name="Close" id="{58cc8f9b-b4a5-e3cb-4ffb-3f4e7ecb5b3a}">
+        <p14:section name="Close" id="{e3e66572-fca1-b833-8c16-9a79305ec1df}">
           <p14:sldIdLst>
             <p14:sldId id="275"/>
           </p14:sldIdLst>
         </p14:section>
-        <p14:section name="Answers" id="{9b058e4f-3ee2-ba14-8fa8-4365a07fdb4b}">
+        <p14:section name="Answers" id="{8577f2e1-61ae-2869-1872-a502fa586d6e}">
           <p14:sldIdLst>
             <p14:sldId id="276"/>
             <p14:sldId id="277"/>
